--- a/tests/fixtures/effects_theme.pptx
+++ b/tests/fixtures/effects_theme.pptx
@@ -25,7 +25,7 @@
     </p:spTree>
   </p:cSld>
   <p:clrMapOvr>
-    <a:overrideClrMapping/>
+    <a:masterClrMapping/>
   </p:clrMapOvr>
 </p:sldLayout>
 </file>
@@ -219,6 +219,9 @@
           </a:effectLst>
           <a:scene3d>
             <a:camera prst="orthographicFront"/>
+            <a:lightRig rig="threePt" dir="t">
+              <a:rot lat="0" lon="0" rev="1200000"/>
+            </a:lightRig>
           </a:scene3d>
           <a:sp3d>
             <a:bevelT w="63500" h="25400"/>
